--- a/tpl/PPT模板.pptx
+++ b/tpl/PPT模板.pptx
@@ -3,20 +3,20 @@
 <p:presentation xmlns:a="http://schemas.openxmlformats.org/drawingml/2006/main" xmlns:r="http://schemas.openxmlformats.org/officeDocument/2006/relationships" xmlns:p="http://schemas.openxmlformats.org/presentationml/2006/main" autoCompressPictures="0">
   <p:sldMasterIdLst>
     <p:sldMasterId id="2147483648" r:id="rId1"/>
-    <p:sldMasterId id="2147483663" r:id="rId2"/>
+    <p:sldMasterId id="2147483663" r:id="rId3"/>
   </p:sldMasterIdLst>
   <p:notesMasterIdLst>
-    <p:notesMasterId r:id="rId8"/>
+    <p:notesMasterId r:id="rId9"/>
   </p:notesMasterIdLst>
   <p:handoutMasterIdLst>
-    <p:handoutMasterId r:id="rId9"/>
+    <p:handoutMasterId r:id="rId10"/>
   </p:handoutMasterIdLst>
   <p:sldIdLst>
-    <p:sldId id="257" r:id="rId3"/>
-    <p:sldId id="3958" r:id="rId4"/>
-    <p:sldId id="3959" r:id="rId5"/>
-    <p:sldId id="3960" r:id="rId6"/>
-    <p:sldId id="3946" r:id="rId7"/>
+    <p:sldId id="257" r:id="rId4"/>
+    <p:sldId id="3958" r:id="rId5"/>
+    <p:sldId id="3959" r:id="rId6"/>
+    <p:sldId id="3960" r:id="rId7"/>
+    <p:sldId id="3946" r:id="rId8"/>
   </p:sldIdLst>
   <p:sldSz cx="12192000" cy="6858000"/>
   <p:notesSz cx="6858000" cy="9144000"/>
@@ -115,14 +115,6 @@
       </a:defRPr>
     </a:lvl9pPr>
   </p:defaultTextStyle>
-  <p:extLst>
-    <p:ext uri="{EFAFB233-063F-42B5-8137-9DF3F51BA10A}">
-      <p15:sldGuideLst xmlns:p15="http://schemas.microsoft.com/office/powerpoint/2012/main"/>
-    </p:ext>
-    <p:ext uri="{2D200454-40CA-4A62-9FC3-DE9A4176ACB9}">
-      <p15:notesGuideLst xmlns:p15="http://schemas.microsoft.com/office/powerpoint/2012/main"/>
-    </p:ext>
-  </p:extLst>
 </p:presentation>
 </file>
 
@@ -208,7 +200,6 @@
           <a:p>
             <a:fld id="{113348CC-58E9-9140-8494-3F4BA61213F7}" type="datetimeFigureOut">
               <a:rPr kumimoji="1" lang="zh-CN" altLang="en-US" smtClean="0"/>
-              <a:t>2026/3/24</a:t>
             </a:fld>
             <a:endParaRPr kumimoji="1" lang="zh-CN" altLang="en-US"/>
           </a:p>
@@ -274,18 +265,12 @@
           <a:p>
             <a:fld id="{5960ACB5-120B-A849-ACB6-7E327AE9452F}" type="slidenum">
               <a:rPr kumimoji="1" lang="zh-CN" altLang="en-US" smtClean="0"/>
-              <a:t>‹#›</a:t>
             </a:fld>
             <a:endParaRPr kumimoji="1" lang="zh-CN" altLang="en-US"/>
           </a:p>
         </p:txBody>
       </p:sp>
     </p:spTree>
-    <p:extLst>
-      <p:ext uri="{BB962C8B-B14F-4D97-AF65-F5344CB8AC3E}">
-        <p14:creationId xmlns:p14="http://schemas.microsoft.com/office/powerpoint/2010/main" val="1"/>
-      </p:ext>
-    </p:extLst>
   </p:cSld>
   <p:clrMap bg1="lt1" tx1="dk1" bg2="lt2" tx2="dk2" accent1="accent1" accent2="accent2" accent3="accent3" accent4="accent4" accent5="accent5" accent6="accent6" hlink="hlink" folHlink="folHlink"/>
 </p:handoutMaster>
@@ -373,7 +358,6 @@
           <a:p>
             <a:fld id="{CDC999D7-7F99-3746-A50A-4B7C9FF226AD}" type="datetimeFigureOut">
               <a:rPr kumimoji="1" lang="zh-CN" altLang="en-US" smtClean="0"/>
-              <a:t>2026/3/24</a:t>
             </a:fld>
             <a:endParaRPr kumimoji="1" lang="zh-CN" altLang="en-US"/>
           </a:p>
@@ -440,6 +424,7 @@
               <a:rPr kumimoji="1" lang="zh-CN" altLang="en-US"/>
               <a:t>单击此处编辑母版文本样式</a:t>
             </a:r>
+            <a:endParaRPr kumimoji="1" lang="zh-CN" altLang="en-US"/>
           </a:p>
           <a:p>
             <a:pPr lvl="1"/>
@@ -447,6 +432,7 @@
               <a:rPr kumimoji="1" lang="zh-CN" altLang="en-US"/>
               <a:t>二级</a:t>
             </a:r>
+            <a:endParaRPr kumimoji="1" lang="zh-CN" altLang="en-US"/>
           </a:p>
           <a:p>
             <a:pPr lvl="2"/>
@@ -454,6 +440,7 @@
               <a:rPr kumimoji="1" lang="zh-CN" altLang="en-US"/>
               <a:t>三级</a:t>
             </a:r>
+            <a:endParaRPr kumimoji="1" lang="zh-CN" altLang="en-US"/>
           </a:p>
           <a:p>
             <a:pPr lvl="3"/>
@@ -461,6 +448,7 @@
               <a:rPr kumimoji="1" lang="zh-CN" altLang="en-US"/>
               <a:t>四级</a:t>
             </a:r>
+            <a:endParaRPr kumimoji="1" lang="zh-CN" altLang="en-US"/>
           </a:p>
           <a:p>
             <a:pPr lvl="4"/>
@@ -468,6 +456,7 @@
               <a:rPr kumimoji="1" lang="zh-CN" altLang="en-US"/>
               <a:t>五级</a:t>
             </a:r>
+            <a:endParaRPr kumimoji="1" lang="zh-CN" altLang="en-US"/>
           </a:p>
         </p:txBody>
       </p:sp>
@@ -531,7 +520,6 @@
           <a:p>
             <a:fld id="{4B2CF82D-95E2-784D-9EEF-51030EC893A3}" type="slidenum">
               <a:rPr kumimoji="1" lang="zh-CN" altLang="en-US" smtClean="0"/>
-              <a:t>‹#›</a:t>
             </a:fld>
             <a:endParaRPr kumimoji="1" lang="zh-CN" altLang="en-US"/>
           </a:p>
@@ -700,7 +688,6 @@
           <a:p>
             <a:fld id="{FE0BE2EF-1EFC-9B46-889F-4515A4DBBA70}" type="slidenum">
               <a:rPr kumimoji="1" lang="zh-CN" altLang="en-US" smtClean="0"/>
-              <a:t>5</a:t>
             </a:fld>
             <a:endParaRPr kumimoji="1" lang="zh-CN" altLang="en-US"/>
           </a:p>
@@ -762,6 +749,7 @@
               <a:rPr kumimoji="1" lang="zh-CN" altLang="en-US"/>
               <a:t>单击此处编辑母版标题样式</a:t>
             </a:r>
+            <a:endParaRPr kumimoji="1" lang="zh-CN" altLang="en-US"/>
           </a:p>
         </p:txBody>
       </p:sp>
@@ -829,6 +817,7 @@
               <a:rPr kumimoji="1" lang="zh-CN" altLang="en-US"/>
               <a:t>单击此处编辑母版副标题样式</a:t>
             </a:r>
+            <a:endParaRPr kumimoji="1" lang="zh-CN" altLang="en-US"/>
           </a:p>
         </p:txBody>
       </p:sp>
@@ -849,7 +838,6 @@
           <a:p>
             <a:fld id="{BFB87016-819A-5341-A389-7551C78F7E31}" type="datetimeFigureOut">
               <a:rPr kumimoji="1" lang="zh-CN" altLang="en-US" smtClean="0"/>
-              <a:t>2026/3/24</a:t>
             </a:fld>
             <a:endParaRPr kumimoji="1" lang="zh-CN" altLang="en-US"/>
           </a:p>
@@ -891,7 +879,6 @@
           <a:p>
             <a:fld id="{ABBC389F-5C18-E04C-BAC7-584A3B16DFF8}" type="slidenum">
               <a:rPr kumimoji="1" lang="zh-CN" altLang="en-US" smtClean="0"/>
-              <a:t>‹#›</a:t>
             </a:fld>
             <a:endParaRPr kumimoji="1" lang="zh-CN" altLang="en-US"/>
           </a:p>
@@ -949,6 +936,7 @@
               <a:rPr kumimoji="1" lang="zh-CN" altLang="en-US"/>
               <a:t>单击此处编辑母版标题样式</a:t>
             </a:r>
+            <a:endParaRPr kumimoji="1" lang="zh-CN" altLang="en-US"/>
           </a:p>
         </p:txBody>
       </p:sp>
@@ -980,6 +968,7 @@
               <a:rPr kumimoji="1" lang="zh-CN" altLang="en-US"/>
               <a:t>单击此处编辑母版文本样式</a:t>
             </a:r>
+            <a:endParaRPr kumimoji="1" lang="zh-CN" altLang="en-US"/>
           </a:p>
           <a:p>
             <a:pPr lvl="1"/>
@@ -987,6 +976,7 @@
               <a:rPr kumimoji="1" lang="zh-CN" altLang="en-US"/>
               <a:t>二级</a:t>
             </a:r>
+            <a:endParaRPr kumimoji="1" lang="zh-CN" altLang="en-US"/>
           </a:p>
           <a:p>
             <a:pPr lvl="2"/>
@@ -994,6 +984,7 @@
               <a:rPr kumimoji="1" lang="zh-CN" altLang="en-US"/>
               <a:t>三级</a:t>
             </a:r>
+            <a:endParaRPr kumimoji="1" lang="zh-CN" altLang="en-US"/>
           </a:p>
           <a:p>
             <a:pPr lvl="3"/>
@@ -1001,6 +992,7 @@
               <a:rPr kumimoji="1" lang="zh-CN" altLang="en-US"/>
               <a:t>四级</a:t>
             </a:r>
+            <a:endParaRPr kumimoji="1" lang="zh-CN" altLang="en-US"/>
           </a:p>
           <a:p>
             <a:pPr lvl="4"/>
@@ -1008,6 +1000,7 @@
               <a:rPr kumimoji="1" lang="zh-CN" altLang="en-US"/>
               <a:t>五级</a:t>
             </a:r>
+            <a:endParaRPr kumimoji="1" lang="zh-CN" altLang="en-US"/>
           </a:p>
         </p:txBody>
       </p:sp>
@@ -1028,7 +1021,6 @@
           <a:p>
             <a:fld id="{BFB87016-819A-5341-A389-7551C78F7E31}" type="datetimeFigureOut">
               <a:rPr kumimoji="1" lang="zh-CN" altLang="en-US" smtClean="0"/>
-              <a:t>2026/3/24</a:t>
             </a:fld>
             <a:endParaRPr kumimoji="1" lang="zh-CN" altLang="en-US"/>
           </a:p>
@@ -1070,7 +1062,6 @@
           <a:p>
             <a:fld id="{ABBC389F-5C18-E04C-BAC7-584A3B16DFF8}" type="slidenum">
               <a:rPr kumimoji="1" lang="zh-CN" altLang="en-US" smtClean="0"/>
-              <a:t>‹#›</a:t>
             </a:fld>
             <a:endParaRPr kumimoji="1" lang="zh-CN" altLang="en-US"/>
           </a:p>
@@ -1128,6 +1119,7 @@
               <a:rPr kumimoji="1" lang="zh-CN" altLang="en-US"/>
               <a:t>单击此处编辑母版标题样式</a:t>
             </a:r>
+            <a:endParaRPr kumimoji="1" lang="zh-CN" altLang="en-US"/>
           </a:p>
         </p:txBody>
       </p:sp>
@@ -1159,6 +1151,7 @@
               <a:rPr kumimoji="1" lang="zh-CN" altLang="en-US"/>
               <a:t>单击此处编辑母版文本样式</a:t>
             </a:r>
+            <a:endParaRPr kumimoji="1" lang="zh-CN" altLang="en-US"/>
           </a:p>
           <a:p>
             <a:pPr lvl="1"/>
@@ -1166,6 +1159,7 @@
               <a:rPr kumimoji="1" lang="zh-CN" altLang="en-US"/>
               <a:t>二级</a:t>
             </a:r>
+            <a:endParaRPr kumimoji="1" lang="zh-CN" altLang="en-US"/>
           </a:p>
           <a:p>
             <a:pPr lvl="2"/>
@@ -1173,6 +1167,7 @@
               <a:rPr kumimoji="1" lang="zh-CN" altLang="en-US"/>
               <a:t>三级</a:t>
             </a:r>
+            <a:endParaRPr kumimoji="1" lang="zh-CN" altLang="en-US"/>
           </a:p>
           <a:p>
             <a:pPr lvl="3"/>
@@ -1180,6 +1175,7 @@
               <a:rPr kumimoji="1" lang="zh-CN" altLang="en-US"/>
               <a:t>四级</a:t>
             </a:r>
+            <a:endParaRPr kumimoji="1" lang="zh-CN" altLang="en-US"/>
           </a:p>
           <a:p>
             <a:pPr lvl="4"/>
@@ -1187,6 +1183,7 @@
               <a:rPr kumimoji="1" lang="zh-CN" altLang="en-US"/>
               <a:t>五级</a:t>
             </a:r>
+            <a:endParaRPr kumimoji="1" lang="zh-CN" altLang="en-US"/>
           </a:p>
         </p:txBody>
       </p:sp>
@@ -1207,7 +1204,6 @@
           <a:p>
             <a:fld id="{BFB87016-819A-5341-A389-7551C78F7E31}" type="datetimeFigureOut">
               <a:rPr kumimoji="1" lang="zh-CN" altLang="en-US" smtClean="0"/>
-              <a:t>2026/3/24</a:t>
             </a:fld>
             <a:endParaRPr kumimoji="1" lang="zh-CN" altLang="en-US"/>
           </a:p>
@@ -1249,7 +1245,6 @@
           <a:p>
             <a:fld id="{ABBC389F-5C18-E04C-BAC7-584A3B16DFF8}" type="slidenum">
               <a:rPr kumimoji="1" lang="zh-CN" altLang="en-US" smtClean="0"/>
-              <a:t>‹#›</a:t>
             </a:fld>
             <a:endParaRPr kumimoji="1" lang="zh-CN" altLang="en-US"/>
           </a:p>
@@ -1412,6 +1407,7 @@
               <a:rPr kumimoji="1" lang="zh-CN" altLang="en-US"/>
               <a:t>单击此处编辑母版标题样式</a:t>
             </a:r>
+            <a:endParaRPr kumimoji="1" lang="zh-CN" altLang="en-US"/>
           </a:p>
         </p:txBody>
       </p:sp>
@@ -1443,6 +1439,7 @@
               <a:rPr kumimoji="1" lang="zh-CN" altLang="en-US"/>
               <a:t>单击此处编辑母版文本样式</a:t>
             </a:r>
+            <a:endParaRPr kumimoji="1" lang="zh-CN" altLang="en-US"/>
           </a:p>
           <a:p>
             <a:pPr lvl="1"/>
@@ -1450,6 +1447,7 @@
               <a:rPr kumimoji="1" lang="zh-CN" altLang="en-US"/>
               <a:t>二级</a:t>
             </a:r>
+            <a:endParaRPr kumimoji="1" lang="zh-CN" altLang="en-US"/>
           </a:p>
           <a:p>
             <a:pPr lvl="2"/>
@@ -1457,6 +1455,7 @@
               <a:rPr kumimoji="1" lang="zh-CN" altLang="en-US"/>
               <a:t>三级</a:t>
             </a:r>
+            <a:endParaRPr kumimoji="1" lang="zh-CN" altLang="en-US"/>
           </a:p>
           <a:p>
             <a:pPr lvl="3"/>
@@ -1464,6 +1463,7 @@
               <a:rPr kumimoji="1" lang="zh-CN" altLang="en-US"/>
               <a:t>四级</a:t>
             </a:r>
+            <a:endParaRPr kumimoji="1" lang="zh-CN" altLang="en-US"/>
           </a:p>
           <a:p>
             <a:pPr lvl="4"/>
@@ -1471,6 +1471,7 @@
               <a:rPr kumimoji="1" lang="zh-CN" altLang="en-US"/>
               <a:t>五级</a:t>
             </a:r>
+            <a:endParaRPr kumimoji="1" lang="zh-CN" altLang="en-US"/>
           </a:p>
         </p:txBody>
       </p:sp>
@@ -1491,7 +1492,6 @@
           <a:p>
             <a:fld id="{BFB87016-819A-5341-A389-7551C78F7E31}" type="datetimeFigureOut">
               <a:rPr kumimoji="1" lang="zh-CN" altLang="en-US" smtClean="0"/>
-              <a:t>2026/3/24</a:t>
             </a:fld>
             <a:endParaRPr kumimoji="1" lang="zh-CN" altLang="en-US"/>
           </a:p>
@@ -1533,7 +1533,6 @@
           <a:p>
             <a:fld id="{ABBC389F-5C18-E04C-BAC7-584A3B16DFF8}" type="slidenum">
               <a:rPr kumimoji="1" lang="zh-CN" altLang="en-US" smtClean="0"/>
-              <a:t>‹#›</a:t>
             </a:fld>
             <a:endParaRPr kumimoji="1" lang="zh-CN" altLang="en-US"/>
           </a:p>
@@ -1595,6 +1594,7 @@
               <a:rPr kumimoji="1" lang="zh-CN" altLang="en-US"/>
               <a:t>单击此处编辑母版标题样式</a:t>
             </a:r>
+            <a:endParaRPr kumimoji="1" lang="zh-CN" altLang="en-US"/>
           </a:p>
         </p:txBody>
       </p:sp>
@@ -1717,6 +1717,7 @@
               <a:rPr kumimoji="1" lang="zh-CN" altLang="en-US"/>
               <a:t>单击此处编辑母版文本样式</a:t>
             </a:r>
+            <a:endParaRPr kumimoji="1" lang="zh-CN" altLang="en-US"/>
           </a:p>
         </p:txBody>
       </p:sp>
@@ -1737,7 +1738,6 @@
           <a:p>
             <a:fld id="{BFB87016-819A-5341-A389-7551C78F7E31}" type="datetimeFigureOut">
               <a:rPr kumimoji="1" lang="zh-CN" altLang="en-US" smtClean="0"/>
-              <a:t>2026/3/24</a:t>
             </a:fld>
             <a:endParaRPr kumimoji="1" lang="zh-CN" altLang="en-US"/>
           </a:p>
@@ -1779,7 +1779,6 @@
           <a:p>
             <a:fld id="{ABBC389F-5C18-E04C-BAC7-584A3B16DFF8}" type="slidenum">
               <a:rPr kumimoji="1" lang="zh-CN" altLang="en-US" smtClean="0"/>
-              <a:t>‹#›</a:t>
             </a:fld>
             <a:endParaRPr kumimoji="1" lang="zh-CN" altLang="en-US"/>
           </a:p>
@@ -1837,6 +1836,7 @@
               <a:rPr kumimoji="1" lang="zh-CN" altLang="en-US"/>
               <a:t>单击此处编辑母版标题样式</a:t>
             </a:r>
+            <a:endParaRPr kumimoji="1" lang="zh-CN" altLang="en-US"/>
           </a:p>
         </p:txBody>
       </p:sp>
@@ -1868,6 +1868,7 @@
               <a:rPr kumimoji="1" lang="zh-CN" altLang="en-US"/>
               <a:t>单击此处编辑母版文本样式</a:t>
             </a:r>
+            <a:endParaRPr kumimoji="1" lang="zh-CN" altLang="en-US"/>
           </a:p>
           <a:p>
             <a:pPr lvl="1"/>
@@ -1875,6 +1876,7 @@
               <a:rPr kumimoji="1" lang="zh-CN" altLang="en-US"/>
               <a:t>二级</a:t>
             </a:r>
+            <a:endParaRPr kumimoji="1" lang="zh-CN" altLang="en-US"/>
           </a:p>
           <a:p>
             <a:pPr lvl="2"/>
@@ -1882,6 +1884,7 @@
               <a:rPr kumimoji="1" lang="zh-CN" altLang="en-US"/>
               <a:t>三级</a:t>
             </a:r>
+            <a:endParaRPr kumimoji="1" lang="zh-CN" altLang="en-US"/>
           </a:p>
           <a:p>
             <a:pPr lvl="3"/>
@@ -1889,6 +1892,7 @@
               <a:rPr kumimoji="1" lang="zh-CN" altLang="en-US"/>
               <a:t>四级</a:t>
             </a:r>
+            <a:endParaRPr kumimoji="1" lang="zh-CN" altLang="en-US"/>
           </a:p>
           <a:p>
             <a:pPr lvl="4"/>
@@ -1896,6 +1900,7 @@
               <a:rPr kumimoji="1" lang="zh-CN" altLang="en-US"/>
               <a:t>五级</a:t>
             </a:r>
+            <a:endParaRPr kumimoji="1" lang="zh-CN" altLang="en-US"/>
           </a:p>
         </p:txBody>
       </p:sp>
@@ -1927,6 +1932,7 @@
               <a:rPr kumimoji="1" lang="zh-CN" altLang="en-US"/>
               <a:t>单击此处编辑母版文本样式</a:t>
             </a:r>
+            <a:endParaRPr kumimoji="1" lang="zh-CN" altLang="en-US"/>
           </a:p>
           <a:p>
             <a:pPr lvl="1"/>
@@ -1934,6 +1940,7 @@
               <a:rPr kumimoji="1" lang="zh-CN" altLang="en-US"/>
               <a:t>二级</a:t>
             </a:r>
+            <a:endParaRPr kumimoji="1" lang="zh-CN" altLang="en-US"/>
           </a:p>
           <a:p>
             <a:pPr lvl="2"/>
@@ -1941,6 +1948,7 @@
               <a:rPr kumimoji="1" lang="zh-CN" altLang="en-US"/>
               <a:t>三级</a:t>
             </a:r>
+            <a:endParaRPr kumimoji="1" lang="zh-CN" altLang="en-US"/>
           </a:p>
           <a:p>
             <a:pPr lvl="3"/>
@@ -1948,6 +1956,7 @@
               <a:rPr kumimoji="1" lang="zh-CN" altLang="en-US"/>
               <a:t>四级</a:t>
             </a:r>
+            <a:endParaRPr kumimoji="1" lang="zh-CN" altLang="en-US"/>
           </a:p>
           <a:p>
             <a:pPr lvl="4"/>
@@ -1955,6 +1964,7 @@
               <a:rPr kumimoji="1" lang="zh-CN" altLang="en-US"/>
               <a:t>五级</a:t>
             </a:r>
+            <a:endParaRPr kumimoji="1" lang="zh-CN" altLang="en-US"/>
           </a:p>
         </p:txBody>
       </p:sp>
@@ -1975,7 +1985,6 @@
           <a:p>
             <a:fld id="{BFB87016-819A-5341-A389-7551C78F7E31}" type="datetimeFigureOut">
               <a:rPr kumimoji="1" lang="zh-CN" altLang="en-US" smtClean="0"/>
-              <a:t>2026/3/24</a:t>
             </a:fld>
             <a:endParaRPr kumimoji="1" lang="zh-CN" altLang="en-US"/>
           </a:p>
@@ -2017,7 +2026,6 @@
           <a:p>
             <a:fld id="{ABBC389F-5C18-E04C-BAC7-584A3B16DFF8}" type="slidenum">
               <a:rPr kumimoji="1" lang="zh-CN" altLang="en-US" smtClean="0"/>
-              <a:t>‹#›</a:t>
             </a:fld>
             <a:endParaRPr kumimoji="1" lang="zh-CN" altLang="en-US"/>
           </a:p>
@@ -2075,6 +2083,7 @@
               <a:rPr kumimoji="1" lang="zh-CN" altLang="en-US"/>
               <a:t>单击此处编辑母版标题样式</a:t>
             </a:r>
+            <a:endParaRPr kumimoji="1" lang="zh-CN" altLang="en-US"/>
           </a:p>
         </p:txBody>
       </p:sp>
@@ -2143,6 +2152,7 @@
               <a:rPr kumimoji="1" lang="zh-CN" altLang="en-US"/>
               <a:t>单击此处编辑母版文本样式</a:t>
             </a:r>
+            <a:endParaRPr kumimoji="1" lang="zh-CN" altLang="en-US"/>
           </a:p>
         </p:txBody>
       </p:sp>
@@ -2174,6 +2184,7 @@
               <a:rPr kumimoji="1" lang="zh-CN" altLang="en-US"/>
               <a:t>单击此处编辑母版文本样式</a:t>
             </a:r>
+            <a:endParaRPr kumimoji="1" lang="zh-CN" altLang="en-US"/>
           </a:p>
           <a:p>
             <a:pPr lvl="1"/>
@@ -2181,6 +2192,7 @@
               <a:rPr kumimoji="1" lang="zh-CN" altLang="en-US"/>
               <a:t>二级</a:t>
             </a:r>
+            <a:endParaRPr kumimoji="1" lang="zh-CN" altLang="en-US"/>
           </a:p>
           <a:p>
             <a:pPr lvl="2"/>
@@ -2188,6 +2200,7 @@
               <a:rPr kumimoji="1" lang="zh-CN" altLang="en-US"/>
               <a:t>三级</a:t>
             </a:r>
+            <a:endParaRPr kumimoji="1" lang="zh-CN" altLang="en-US"/>
           </a:p>
           <a:p>
             <a:pPr lvl="3"/>
@@ -2195,6 +2208,7 @@
               <a:rPr kumimoji="1" lang="zh-CN" altLang="en-US"/>
               <a:t>四级</a:t>
             </a:r>
+            <a:endParaRPr kumimoji="1" lang="zh-CN" altLang="en-US"/>
           </a:p>
           <a:p>
             <a:pPr lvl="4"/>
@@ -2202,6 +2216,7 @@
               <a:rPr kumimoji="1" lang="zh-CN" altLang="en-US"/>
               <a:t>五级</a:t>
             </a:r>
+            <a:endParaRPr kumimoji="1" lang="zh-CN" altLang="en-US"/>
           </a:p>
         </p:txBody>
       </p:sp>
@@ -2270,6 +2285,7 @@
               <a:rPr kumimoji="1" lang="zh-CN" altLang="en-US"/>
               <a:t>单击此处编辑母版文本样式</a:t>
             </a:r>
+            <a:endParaRPr kumimoji="1" lang="zh-CN" altLang="en-US"/>
           </a:p>
         </p:txBody>
       </p:sp>
@@ -2301,6 +2317,7 @@
               <a:rPr kumimoji="1" lang="zh-CN" altLang="en-US"/>
               <a:t>单击此处编辑母版文本样式</a:t>
             </a:r>
+            <a:endParaRPr kumimoji="1" lang="zh-CN" altLang="en-US"/>
           </a:p>
           <a:p>
             <a:pPr lvl="1"/>
@@ -2308,6 +2325,7 @@
               <a:rPr kumimoji="1" lang="zh-CN" altLang="en-US"/>
               <a:t>二级</a:t>
             </a:r>
+            <a:endParaRPr kumimoji="1" lang="zh-CN" altLang="en-US"/>
           </a:p>
           <a:p>
             <a:pPr lvl="2"/>
@@ -2315,6 +2333,7 @@
               <a:rPr kumimoji="1" lang="zh-CN" altLang="en-US"/>
               <a:t>三级</a:t>
             </a:r>
+            <a:endParaRPr kumimoji="1" lang="zh-CN" altLang="en-US"/>
           </a:p>
           <a:p>
             <a:pPr lvl="3"/>
@@ -2322,6 +2341,7 @@
               <a:rPr kumimoji="1" lang="zh-CN" altLang="en-US"/>
               <a:t>四级</a:t>
             </a:r>
+            <a:endParaRPr kumimoji="1" lang="zh-CN" altLang="en-US"/>
           </a:p>
           <a:p>
             <a:pPr lvl="4"/>
@@ -2329,6 +2349,7 @@
               <a:rPr kumimoji="1" lang="zh-CN" altLang="en-US"/>
               <a:t>五级</a:t>
             </a:r>
+            <a:endParaRPr kumimoji="1" lang="zh-CN" altLang="en-US"/>
           </a:p>
         </p:txBody>
       </p:sp>
@@ -2349,7 +2370,6 @@
           <a:p>
             <a:fld id="{BFB87016-819A-5341-A389-7551C78F7E31}" type="datetimeFigureOut">
               <a:rPr kumimoji="1" lang="zh-CN" altLang="en-US" smtClean="0"/>
-              <a:t>2026/3/24</a:t>
             </a:fld>
             <a:endParaRPr kumimoji="1" lang="zh-CN" altLang="en-US"/>
           </a:p>
@@ -2391,7 +2411,6 @@
           <a:p>
             <a:fld id="{ABBC389F-5C18-E04C-BAC7-584A3B16DFF8}" type="slidenum">
               <a:rPr kumimoji="1" lang="zh-CN" altLang="en-US" smtClean="0"/>
-              <a:t>‹#›</a:t>
             </a:fld>
             <a:endParaRPr kumimoji="1" lang="zh-CN" altLang="en-US"/>
           </a:p>
@@ -2449,6 +2468,7 @@
               <a:rPr kumimoji="1" lang="zh-CN" altLang="en-US"/>
               <a:t>单击此处编辑母版标题样式</a:t>
             </a:r>
+            <a:endParaRPr kumimoji="1" lang="zh-CN" altLang="en-US"/>
           </a:p>
         </p:txBody>
       </p:sp>
@@ -2469,7 +2489,6 @@
           <a:p>
             <a:fld id="{BFB87016-819A-5341-A389-7551C78F7E31}" type="datetimeFigureOut">
               <a:rPr kumimoji="1" lang="zh-CN" altLang="en-US" smtClean="0"/>
-              <a:t>2026/3/24</a:t>
             </a:fld>
             <a:endParaRPr kumimoji="1" lang="zh-CN" altLang="en-US"/>
           </a:p>
@@ -2511,7 +2530,6 @@
           <a:p>
             <a:fld id="{ABBC389F-5C18-E04C-BAC7-584A3B16DFF8}" type="slidenum">
               <a:rPr kumimoji="1" lang="zh-CN" altLang="en-US" smtClean="0"/>
-              <a:t>‹#›</a:t>
             </a:fld>
             <a:endParaRPr kumimoji="1" lang="zh-CN" altLang="en-US"/>
           </a:p>
@@ -2559,7 +2577,6 @@
           <a:p>
             <a:fld id="{BFB87016-819A-5341-A389-7551C78F7E31}" type="datetimeFigureOut">
               <a:rPr kumimoji="1" lang="zh-CN" altLang="en-US" smtClean="0"/>
-              <a:t>2026/3/24</a:t>
             </a:fld>
             <a:endParaRPr kumimoji="1" lang="zh-CN" altLang="en-US"/>
           </a:p>
@@ -2601,7 +2618,6 @@
           <a:p>
             <a:fld id="{ABBC389F-5C18-E04C-BAC7-584A3B16DFF8}" type="slidenum">
               <a:rPr kumimoji="1" lang="zh-CN" altLang="en-US" smtClean="0"/>
-              <a:t>‹#›</a:t>
             </a:fld>
             <a:endParaRPr kumimoji="1" lang="zh-CN" altLang="en-US"/>
           </a:p>
@@ -2663,6 +2679,7 @@
               <a:rPr kumimoji="1" lang="zh-CN" altLang="en-US"/>
               <a:t>单击此处编辑母版标题样式</a:t>
             </a:r>
+            <a:endParaRPr kumimoji="1" lang="zh-CN" altLang="en-US"/>
           </a:p>
         </p:txBody>
       </p:sp>
@@ -2722,6 +2739,7 @@
               <a:rPr kumimoji="1" lang="zh-CN" altLang="en-US"/>
               <a:t>单击此处编辑母版文本样式</a:t>
             </a:r>
+            <a:endParaRPr kumimoji="1" lang="zh-CN" altLang="en-US"/>
           </a:p>
           <a:p>
             <a:pPr lvl="1"/>
@@ -2729,6 +2747,7 @@
               <a:rPr kumimoji="1" lang="zh-CN" altLang="en-US"/>
               <a:t>二级</a:t>
             </a:r>
+            <a:endParaRPr kumimoji="1" lang="zh-CN" altLang="en-US"/>
           </a:p>
           <a:p>
             <a:pPr lvl="2"/>
@@ -2736,6 +2755,7 @@
               <a:rPr kumimoji="1" lang="zh-CN" altLang="en-US"/>
               <a:t>三级</a:t>
             </a:r>
+            <a:endParaRPr kumimoji="1" lang="zh-CN" altLang="en-US"/>
           </a:p>
           <a:p>
             <a:pPr lvl="3"/>
@@ -2743,6 +2763,7 @@
               <a:rPr kumimoji="1" lang="zh-CN" altLang="en-US"/>
               <a:t>四级</a:t>
             </a:r>
+            <a:endParaRPr kumimoji="1" lang="zh-CN" altLang="en-US"/>
           </a:p>
           <a:p>
             <a:pPr lvl="4"/>
@@ -2750,6 +2771,7 @@
               <a:rPr kumimoji="1" lang="zh-CN" altLang="en-US"/>
               <a:t>五级</a:t>
             </a:r>
+            <a:endParaRPr kumimoji="1" lang="zh-CN" altLang="en-US"/>
           </a:p>
         </p:txBody>
       </p:sp>
@@ -2818,6 +2840,7 @@
               <a:rPr kumimoji="1" lang="zh-CN" altLang="en-US"/>
               <a:t>单击此处编辑母版文本样式</a:t>
             </a:r>
+            <a:endParaRPr kumimoji="1" lang="zh-CN" altLang="en-US"/>
           </a:p>
         </p:txBody>
       </p:sp>
@@ -2838,7 +2861,6 @@
           <a:p>
             <a:fld id="{BFB87016-819A-5341-A389-7551C78F7E31}" type="datetimeFigureOut">
               <a:rPr kumimoji="1" lang="zh-CN" altLang="en-US" smtClean="0"/>
-              <a:t>2026/3/24</a:t>
             </a:fld>
             <a:endParaRPr kumimoji="1" lang="zh-CN" altLang="en-US"/>
           </a:p>
@@ -2880,7 +2902,6 @@
           <a:p>
             <a:fld id="{ABBC389F-5C18-E04C-BAC7-584A3B16DFF8}" type="slidenum">
               <a:rPr kumimoji="1" lang="zh-CN" altLang="en-US" smtClean="0"/>
-              <a:t>‹#›</a:t>
             </a:fld>
             <a:endParaRPr kumimoji="1" lang="zh-CN" altLang="en-US"/>
           </a:p>
@@ -2942,6 +2963,7 @@
               <a:rPr kumimoji="1" lang="zh-CN" altLang="en-US"/>
               <a:t>单击此处编辑母版标题样式</a:t>
             </a:r>
+            <a:endParaRPr kumimoji="1" lang="zh-CN" altLang="en-US"/>
           </a:p>
         </p:txBody>
       </p:sp>
@@ -3074,6 +3096,7 @@
               <a:rPr kumimoji="1" lang="zh-CN" altLang="en-US"/>
               <a:t>单击此处编辑母版文本样式</a:t>
             </a:r>
+            <a:endParaRPr kumimoji="1" lang="zh-CN" altLang="en-US"/>
           </a:p>
         </p:txBody>
       </p:sp>
@@ -3094,7 +3117,6 @@
           <a:p>
             <a:fld id="{BFB87016-819A-5341-A389-7551C78F7E31}" type="datetimeFigureOut">
               <a:rPr kumimoji="1" lang="zh-CN" altLang="en-US" smtClean="0"/>
-              <a:t>2026/3/24</a:t>
             </a:fld>
             <a:endParaRPr kumimoji="1" lang="zh-CN" altLang="en-US"/>
           </a:p>
@@ -3136,7 +3158,6 @@
           <a:p>
             <a:fld id="{ABBC389F-5C18-E04C-BAC7-584A3B16DFF8}" type="slidenum">
               <a:rPr kumimoji="1" lang="zh-CN" altLang="en-US" smtClean="0"/>
-              <a:t>‹#›</a:t>
             </a:fld>
             <a:endParaRPr kumimoji="1" lang="zh-CN" altLang="en-US"/>
           </a:p>
@@ -3207,7 +3228,6 @@
           <a:p>
             <a:fld id="{BFB87016-819A-5341-A389-7551C78F7E31}" type="datetimeFigureOut">
               <a:rPr kumimoji="1" lang="zh-CN" altLang="en-US" smtClean="0"/>
-              <a:t>2026/3/24</a:t>
             </a:fld>
             <a:endParaRPr kumimoji="1" lang="zh-CN" altLang="en-US"/>
           </a:p>
@@ -3285,7 +3305,6 @@
           <a:p>
             <a:fld id="{ABBC389F-5C18-E04C-BAC7-584A3B16DFF8}" type="slidenum">
               <a:rPr kumimoji="1" lang="zh-CN" altLang="en-US" smtClean="0"/>
-              <a:t>‹#›</a:t>
             </a:fld>
             <a:endParaRPr kumimoji="1" lang="zh-CN" altLang="en-US"/>
           </a:p>
@@ -3379,6 +3398,17 @@
                 </a:rPr>
                 <a:t>最佳实践</a:t>
               </a:r>
+              <a:endParaRPr lang="zh-CN" altLang="en-US" sz="800" b="0" i="0" dirty="0">
+                <a:solidFill>
+                  <a:schemeClr val="tx1">
+                    <a:lumMod val="50000"/>
+                    <a:lumOff val="50000"/>
+                  </a:schemeClr>
+                </a:solidFill>
+                <a:latin typeface="Microsoft YaHei Light" panose="020B0503020204020204" pitchFamily="34" charset="-122"/>
+                <a:ea typeface="Microsoft YaHei Light" panose="020B0503020204020204" pitchFamily="34" charset="-122"/>
+                <a:cs typeface="阿里巴巴普惠体 H" panose="00020600040101010101" pitchFamily="18" charset="-122"/>
+              </a:endParaRPr>
             </a:p>
           </p:txBody>
         </p:sp>
@@ -3548,6 +3578,7 @@
                 <a:rPr lang="en-US" altLang="zh-CN" dirty="0"/>
                 <a:t>Best Practices for Authentic Materials</a:t>
               </a:r>
+              <a:endParaRPr lang="en-US" altLang="zh-CN" dirty="0"/>
             </a:p>
           </p:txBody>
         </p:sp>
@@ -3594,6 +3625,7 @@
                 <a:rPr lang="zh-CN" altLang="en-US" dirty="0"/>
                 <a:t>Guangdong Zhenjia Enterprise Management Consulting Co., Ltd.</a:t>
               </a:r>
+              <a:endParaRPr lang="zh-CN" altLang="en-US" dirty="0"/>
             </a:p>
           </p:txBody>
         </p:sp>
@@ -3662,6 +3694,14 @@
                 </a:rPr>
                 <a:t>真佳咨询 </a:t>
               </a:r>
+              <a:endParaRPr lang="zh-CN" altLang="en-US" sz="1100" dirty="0">
+                <a:solidFill>
+                  <a:schemeClr val="tx1">
+                    <a:lumMod val="75000"/>
+                    <a:lumOff val="25000"/>
+                  </a:schemeClr>
+                </a:solidFill>
+              </a:endParaRPr>
             </a:p>
           </p:txBody>
         </p:sp>
@@ -3674,7 +3714,7 @@
             <p:nvPr userDrawn="1"/>
           </p:nvPicPr>
           <p:blipFill rotWithShape="1">
-            <a:blip r:embed="rId16">
+            <a:blip r:embed="rId15">
               <a:extLst>
                 <a:ext uri="{28A0092B-C50C-407E-A947-70E740481C1C}">
                   <a14:useLocalDpi xmlns:a14="http://schemas.microsoft.com/office/drawing/2010/main" val="0"/>
@@ -4441,6 +4481,15 @@
               </a:rPr>
               <a:t>名称</a:t>
             </a:r>
+            <a:endParaRPr kumimoji="1" lang="zh-CN" altLang="en-GB" sz="600" i="0" dirty="0">
+              <a:solidFill>
+                <a:schemeClr val="bg1">
+                  <a:lumMod val="75000"/>
+                </a:schemeClr>
+              </a:solidFill>
+              <a:latin typeface="Microsoft YaHei Light" panose="020B0503020204020204" pitchFamily="34" charset="-122"/>
+              <a:ea typeface="Microsoft YaHei Light" panose="020B0503020204020204" pitchFamily="34" charset="-122"/>
+            </a:endParaRPr>
           </a:p>
         </p:txBody>
       </p:sp>
@@ -4747,6 +4796,17 @@
                 </a:rPr>
                 <a:t>最佳实践</a:t>
               </a:r>
+              <a:endParaRPr lang="zh-CN" altLang="en-US" sz="800" b="0" i="0" dirty="0">
+                <a:solidFill>
+                  <a:schemeClr val="tx1">
+                    <a:lumMod val="50000"/>
+                    <a:lumOff val="50000"/>
+                  </a:schemeClr>
+                </a:solidFill>
+                <a:latin typeface="Microsoft YaHei Light" panose="020B0503020204020204" pitchFamily="34" charset="-122"/>
+                <a:ea typeface="Microsoft YaHei Light" panose="020B0503020204020204" pitchFamily="34" charset="-122"/>
+                <a:cs typeface="阿里巴巴普惠体 H" panose="00020600040101010101" pitchFamily="18" charset="-122"/>
+              </a:endParaRPr>
             </a:p>
           </p:txBody>
         </p:sp>
@@ -4916,6 +4976,7 @@
                 <a:rPr lang="en-US" altLang="zh-CN" dirty="0"/>
                 <a:t>Best Practices for Authentic Materials</a:t>
               </a:r>
+              <a:endParaRPr lang="en-US" altLang="zh-CN" dirty="0"/>
             </a:p>
           </p:txBody>
         </p:sp>
@@ -4962,6 +5023,7 @@
                 <a:rPr lang="zh-CN" altLang="en-US" dirty="0"/>
                 <a:t>Guangdong Zhenjia Enterprise Management Consulting Co., Ltd.</a:t>
               </a:r>
+              <a:endParaRPr lang="zh-CN" altLang="en-US" dirty="0"/>
             </a:p>
           </p:txBody>
         </p:sp>
@@ -5131,6 +5193,16 @@
               </a:rPr>
               <a:t>  </a:t>
             </a:r>
+            <a:endParaRPr kumimoji="1" lang="en-US" altLang="zh-CN" sz="1200" dirty="0">
+              <a:solidFill>
+                <a:schemeClr val="bg1">
+                  <a:lumMod val="75000"/>
+                </a:schemeClr>
+              </a:solidFill>
+              <a:latin typeface="Microsoft YaHei Light" panose="020B0503020204020204" pitchFamily="34" charset="-122"/>
+              <a:ea typeface="Microsoft YaHei Light" panose="020B0503020204020204" pitchFamily="34" charset="-122"/>
+              <a:sym typeface="+mn-ea"/>
+            </a:endParaRPr>
           </a:p>
         </p:txBody>
       </p:sp>
@@ -5198,6 +5270,14 @@
                 </a:rPr>
                 <a:t>真佳咨询 </a:t>
               </a:r>
+              <a:endParaRPr lang="zh-CN" altLang="en-US" sz="1100" dirty="0">
+                <a:solidFill>
+                  <a:schemeClr val="tx1">
+                    <a:lumMod val="75000"/>
+                    <a:lumOff val="25000"/>
+                  </a:schemeClr>
+                </a:solidFill>
+              </a:endParaRPr>
             </a:p>
           </p:txBody>
         </p:sp>
@@ -5210,7 +5290,7 @@
             <p:nvPr userDrawn="1"/>
           </p:nvPicPr>
           <p:blipFill rotWithShape="1">
-            <a:blip r:embed="rId3">
+            <a:blip r:embed="rId2">
               <a:extLst>
                 <a:ext uri="{28A0092B-C50C-407E-A947-70E740481C1C}">
                   <a14:useLocalDpi xmlns:a14="http://schemas.microsoft.com/office/drawing/2010/main" val="0"/>
@@ -5704,6 +5784,15 @@
               </a:rPr>
               <a:t>课程名称英文</a:t>
             </a:r>
+            <a:endParaRPr kumimoji="1" lang="zh-CN" altLang="en-US" sz="1600" dirty="0">
+              <a:solidFill>
+                <a:schemeClr val="bg1">
+                  <a:lumMod val="65000"/>
+                </a:schemeClr>
+              </a:solidFill>
+              <a:latin typeface="Microsoft YaHei Light" panose="020B0503020204020204" pitchFamily="34" charset="-122"/>
+              <a:ea typeface="Microsoft YaHei Light" panose="020B0503020204020204" pitchFamily="34" charset="-122"/>
+            </a:endParaRPr>
           </a:p>
         </p:txBody>
       </p:sp>
@@ -5802,11 +5891,11 @@
           <p:nvPr/>
         </p:nvPicPr>
         <p:blipFill>
-          <a:blip r:embed="rId4">
+          <a:blip r:embed="rId1">
             <a:extLst>
               <a:ext uri="{BEBA8EAE-BF5A-486C-A8C5-ECC9F3942E4B}">
                 <a14:imgProps xmlns:a14="http://schemas.microsoft.com/office/drawing/2010/main">
-                  <a14:imgLayer r:embed="rId5">
+                  <a14:imgLayer r:embed="rId2">
                     <a14:imgEffect>
                       <a14:saturation sat="200000"/>
                     </a14:imgEffect>
@@ -5899,7 +5988,7 @@
           <p:nvPr/>
         </p:nvPicPr>
         <p:blipFill>
-          <a:blip r:embed="rId6">
+          <a:blip r:embed="rId3">
             <a:extLst>
               <a:ext uri="{28A0092B-C50C-407E-A947-70E740481C1C}">
                 <a14:useLocalDpi xmlns:a14="http://schemas.microsoft.com/office/drawing/2010/main" val="0"/>
@@ -6025,7 +6114,7 @@
           <p:cNvSpPr/>
           <p:nvPr>
             <p:custDataLst>
-              <p:tags r:id="rId1"/>
+              <p:tags r:id="rId4"/>
             </p:custDataLst>
           </p:nvPr>
         </p:nvSpPr>
@@ -6081,7 +6170,7 @@
           <p:cNvSpPr txBox="1"/>
           <p:nvPr>
             <p:custDataLst>
-              <p:tags r:id="rId2"/>
+              <p:tags r:id="rId5"/>
             </p:custDataLst>
           </p:nvPr>
         </p:nvSpPr>
@@ -6167,6 +6256,13 @@
               </a:rPr>
               <a:t>&amp;CEO</a:t>
             </a:r>
+            <a:endParaRPr lang="en-US" altLang="zh-CN" sz="1100" kern="0" dirty="0">
+              <a:solidFill>
+                <a:schemeClr val="bg1"/>
+              </a:solidFill>
+              <a:latin typeface="Microsoft YaHei Light" panose="020B0503020204020204" pitchFamily="34" charset="-122"/>
+              <a:ea typeface="Microsoft YaHei Light" panose="020B0503020204020204" pitchFamily="34" charset="-122"/>
+            </a:endParaRPr>
           </a:p>
         </p:txBody>
       </p:sp>
@@ -6440,6 +6536,16 @@
               </a:rPr>
               <a:t>章节英文名</a:t>
             </a:r>
+            <a:endParaRPr kumimoji="1" lang="zh-CN" altLang="en-US" sz="800" b="0" i="0" dirty="0">
+              <a:solidFill>
+                <a:schemeClr val="tx1">
+                  <a:lumMod val="75000"/>
+                  <a:lumOff val="25000"/>
+                </a:schemeClr>
+              </a:solidFill>
+              <a:latin typeface="Microsoft YaHei Light" panose="020B0503020204020204" pitchFamily="34" charset="-122"/>
+              <a:ea typeface="Microsoft YaHei Light" panose="020B0503020204020204" pitchFamily="34" charset="-122"/>
+            </a:endParaRPr>
           </a:p>
         </p:txBody>
       </p:sp>
@@ -6495,11 +6601,11 @@
   <p:clrMapOvr>
     <a:masterClrMapping/>
   </p:clrMapOvr>
-  <mc:AlternateContent xmlns:mc="http://schemas.openxmlformats.org/markup-compatibility/2006" xmlns:p14="http://schemas.microsoft.com/office/powerpoint/2010/main">
-    <mc:Choice Requires="p14">
+  <mc:AlternateContent xmlns:mc="http://schemas.openxmlformats.org/markup-compatibility/2006">
+    <mc:Choice xmlns:p14="http://schemas.microsoft.com/office/powerpoint/2010/main" Requires="p14">
       <p:transition p14:dur="10"/>
     </mc:Choice>
-    <mc:Fallback xmlns="">
+    <mc:Fallback>
       <p:transition/>
     </mc:Fallback>
   </mc:AlternateContent>
@@ -6531,8 +6637,8 @@
         </p:nvSpPr>
         <p:spPr>
           <a:xfrm>
-            <a:off x="3602181" y="2200681"/>
-            <a:ext cx="6148484" cy="1445260"/>
+            <a:off x="0" y="2200910"/>
+            <a:ext cx="9751060" cy="1445260"/>
           </a:xfrm>
           <a:prstGeom prst="rect">
             <a:avLst/>
@@ -6585,6 +6691,16 @@
               </a:rPr>
               <a:t>章节英文名称</a:t>
             </a:r>
+            <a:endParaRPr kumimoji="1" lang="zh-CN" altLang="en-US" sz="2800" b="0" i="0" dirty="0">
+              <a:solidFill>
+                <a:schemeClr val="tx1">
+                  <a:lumMod val="75000"/>
+                  <a:lumOff val="25000"/>
+                </a:schemeClr>
+              </a:solidFill>
+              <a:latin typeface="Microsoft YaHei Light" panose="020B0503020204020204" pitchFamily="34" charset="-122"/>
+              <a:ea typeface="Microsoft YaHei Light" panose="020B0503020204020204" pitchFamily="34" charset="-122"/>
+            </a:endParaRPr>
           </a:p>
         </p:txBody>
       </p:sp>
@@ -6593,11 +6709,11 @@
   <p:clrMapOvr>
     <a:masterClrMapping/>
   </p:clrMapOvr>
-  <mc:AlternateContent xmlns:mc="http://schemas.openxmlformats.org/markup-compatibility/2006" xmlns:p14="http://schemas.microsoft.com/office/powerpoint/2010/main">
-    <mc:Choice Requires="p14">
+  <mc:AlternateContent xmlns:mc="http://schemas.openxmlformats.org/markup-compatibility/2006">
+    <mc:Choice xmlns:p14="http://schemas.microsoft.com/office/powerpoint/2010/main" Requires="p14">
       <p:transition p14:dur="10"/>
     </mc:Choice>
-    <mc:Fallback xmlns="">
+    <mc:Fallback>
       <p:transition/>
     </mc:Fallback>
   </mc:AlternateContent>
@@ -6854,6 +6970,15 @@
               </a:rPr>
               <a:t>Any limitation starts from your own heart</a:t>
             </a:r>
+            <a:endParaRPr lang="en-US" altLang="zh-CN" sz="800" dirty="0">
+              <a:solidFill>
+                <a:schemeClr val="bg1">
+                  <a:lumMod val="75000"/>
+                </a:schemeClr>
+              </a:solidFill>
+              <a:latin typeface="Microsoft YaHei Light" panose="020B0503020204020204" pitchFamily="34" charset="-122"/>
+              <a:ea typeface="Microsoft YaHei Light" panose="020B0503020204020204" pitchFamily="34" charset="-122"/>
+            </a:endParaRPr>
           </a:p>
           <a:p>
             <a:r>
@@ -6868,6 +6993,15 @@
               </a:rPr>
               <a:t>All major breakthroughs come from breaking old ways of thinking</a:t>
             </a:r>
+            <a:endParaRPr lang="en-US" altLang="zh-CN" sz="800" dirty="0">
+              <a:solidFill>
+                <a:schemeClr val="bg1">
+                  <a:lumMod val="75000"/>
+                </a:schemeClr>
+              </a:solidFill>
+              <a:latin typeface="Microsoft YaHei Light" panose="020B0503020204020204" pitchFamily="34" charset="-122"/>
+              <a:ea typeface="Microsoft YaHei Light" panose="020B0503020204020204" pitchFamily="34" charset="-122"/>
+            </a:endParaRPr>
           </a:p>
         </p:txBody>
       </p:sp>
@@ -6970,6 +7104,14 @@
                 </a:rPr>
                 <a:t> </a:t>
               </a:r>
+              <a:endParaRPr lang="zh-CN" altLang="en-US" sz="1000" dirty="0">
+                <a:solidFill>
+                  <a:schemeClr val="tx1">
+                    <a:lumMod val="75000"/>
+                    <a:lumOff val="25000"/>
+                  </a:schemeClr>
+                </a:solidFill>
+              </a:endParaRPr>
             </a:p>
           </p:txBody>
         </p:sp>
@@ -6982,7 +7124,7 @@
             <p:nvPr/>
           </p:nvPicPr>
           <p:blipFill rotWithShape="1">
-            <a:blip r:embed="rId3">
+            <a:blip r:embed="rId1">
               <a:extLst>
                 <a:ext uri="{28A0092B-C50C-407E-A947-70E740481C1C}">
                   <a14:useLocalDpi xmlns:a14="http://schemas.microsoft.com/office/drawing/2010/main" val="0"/>
@@ -7074,13 +7216,13 @@
 </file>
 
 <file path=ppt/tags/tag1.xml><?xml version="1.0" encoding="utf-8"?>
-<p:tagLst xmlns:a="http://schemas.openxmlformats.org/drawingml/2006/main" xmlns:r="http://schemas.openxmlformats.org/officeDocument/2006/relationships" xmlns:p="http://schemas.openxmlformats.org/presentationml/2006/main">
+<p:tagLst xmlns:p="http://schemas.openxmlformats.org/presentationml/2006/main">
   <p:tag name="KSO_WM_BEAUTIFY_FLAG" val=""/>
 </p:tagLst>
 </file>
 
 <file path=ppt/tags/tag2.xml><?xml version="1.0" encoding="utf-8"?>
-<p:tagLst xmlns:a="http://schemas.openxmlformats.org/drawingml/2006/main" xmlns:r="http://schemas.openxmlformats.org/officeDocument/2006/relationships" xmlns:p="http://schemas.openxmlformats.org/presentationml/2006/main">
+<p:tagLst xmlns:p="http://schemas.openxmlformats.org/presentationml/2006/main">
   <p:tag name="KSO_WM_BEAUTIFY_FLAG" val=""/>
 </p:tagLst>
 </file>
@@ -7357,7 +7499,6 @@
       </a:style>
     </a:lnDef>
   </a:objectDefaults>
-  <a:extraClrSchemeLst/>
   <a:extLst>
     <a:ext uri="{05A4C25C-085E-4340-85A3-A5531E510DB2}">
       <thm15:themeFamily xmlns:thm15="http://schemas.microsoft.com/office/thememl/2012/main" name="Office Theme" id="{62F939B6-93AF-4DB8-9C6B-D6C7DFDC589F}" vid="{4A3C46E8-61CC-4603-A589-7422A47A8E4A}"/>
@@ -7638,7 +7779,6 @@
       </a:style>
     </a:lnDef>
   </a:objectDefaults>
-  <a:extraClrSchemeLst/>
   <a:extLst>
     <a:ext uri="{05A4C25C-085E-4340-85A3-A5531E510DB2}">
       <thm15:themeFamily xmlns:thm15="http://schemas.microsoft.com/office/thememl/2012/main" name="Office Theme" id="{62F939B6-93AF-4DB8-9C6B-D6C7DFDC589F}" vid="{4A3C46E8-61CC-4603-A589-7422A47A8E4A}"/>
@@ -7919,7 +8059,6 @@
       </a:style>
     </a:lnDef>
   </a:objectDefaults>
-  <a:extraClrSchemeLst/>
   <a:extLst>
     <a:ext uri="{05A4C25C-085E-4340-85A3-A5531E510DB2}">
       <thm15:themeFamily xmlns:thm15="http://schemas.microsoft.com/office/thememl/2012/main" name="Office Theme" id="{62F939B6-93AF-4DB8-9C6B-D6C7DFDC589F}" vid="{4A3C46E8-61CC-4603-A589-7422A47A8E4A}"/>
@@ -8200,7 +8339,6 @@
       </a:style>
     </a:lnDef>
   </a:objectDefaults>
-  <a:extraClrSchemeLst/>
   <a:extLst>
     <a:ext uri="{05A4C25C-085E-4340-85A3-A5531E510DB2}">
       <thm15:themeFamily xmlns:thm15="http://schemas.microsoft.com/office/thememl/2012/main" name="Office Theme" id="{62F939B6-93AF-4DB8-9C6B-D6C7DFDC589F}" vid="{4A3C46E8-61CC-4603-A589-7422A47A8E4A}"/>
